--- a/lectures/L6.pptx
+++ b/lectures/L6.pptx
@@ -12950,7 +12950,7 @@
           <a:p>
             <a:r>
               <a:rPr lang="it-IT" sz="2400" dirty="0"/>
-              <a:t>Funtion of price and quantity sold on the market</a:t>
+              <a:t>Function of price and quantity sold on the market</a:t>
             </a:r>
           </a:p>
           <a:p>
@@ -13053,7 +13053,7 @@
           <a:p>
             <a:r>
               <a:rPr lang="it-IT" sz="2400" dirty="0"/>
-              <a:t>Equilibrium price – there exists only price where the expections of consumes meet the ones of producers</a:t>
+              <a:t>Equilibrium price – there exists only one price where the expectations of consumers meet the ones of producers</a:t>
             </a:r>
           </a:p>
           <a:p>
@@ -13325,7 +13325,7 @@
             <a:pPr lvl="1"/>
             <a:r>
               <a:rPr lang="it-IT" sz="2400" dirty="0"/>
-              <a:t>Producers will decrese their prices </a:t>
+              <a:t>Producers will decrease their prices </a:t>
             </a:r>
           </a:p>
           <a:p>
@@ -13598,7 +13598,7 @@
           <a:p>
             <a:r>
               <a:rPr lang="en-US" sz="2400" dirty="0"/>
-              <a:t>Once the market reaches its equilibrium, all buyers and sellers are satisfied, and there is any upward or downward shift along the demand and supply curves.</a:t>
+              <a:t>Once the market reaches its equilibrium, all buyers and sellers are satisfied, and there is no upward or downward shift along the demand and supply curves.</a:t>
             </a:r>
           </a:p>
           <a:p>
